--- a/IEP/lesson6-representations-IEP.pptx
+++ b/IEP/lesson6-representations-IEP.pptx
@@ -3166,7 +3166,7 @@
                 <a:latin typeface="Segoe UI"/>
                 <a:cs typeface="Segoe UI"/>
               </a:rPr>
-              <a:t xml:space="preserve">Bell work, homework and the quiz are the same pages as the general lesson. Assign fewer items, allow notes and a calculator, and give extended time as the IEP lists.</a:t>
+              <a:t xml:space="preserve">The IEP pages have 3 answer choices, 6 homework and quiz questions, a reminder card and read-aloud. Allow notes and a calculator, and give extended time as the IEP lists.</a:t>
             </a:r>
             <a:endParaRPr lang="en-US" sz="1575" dirty="0"/>
           </a:p>

--- a/IEP/lesson6-representations-IEP.pptx
+++ b/IEP/lesson6-representations-IEP.pptx
@@ -1964,6 +1964,40 @@
           </a:p>
         </p:txBody>
       </p:sp>
+      <p:sp>
+        <p:nvSpPr>
+          <p:cNvPr id="12" name="Slide Number 12"/>
+          <p:cNvSpPr txBox="1"/>
+          <p:nvPr/>
+        </p:nvSpPr>
+        <p:spPr>
+          <a:xfrm>
+            <a:off x="11277295" y="6611112"/>
+            <a:ext cx="685800" cy="201168"/>
+          </a:xfrm>
+          <a:prstGeom prst="rect">
+            <a:avLst/>
+          </a:prstGeom>
+          <a:noFill/>
+        </p:spPr>
+        <p:txBody>
+          <a:bodyPr wrap="none" lIns="0" tIns="0" rIns="0" bIns="0" anchor="b">
+            <a:noAutofit/>
+          </a:bodyPr>
+          <a:lstStyle/>
+          <a:p>
+            <a:pPr algn="r"/>
+            <a:fld id="{5C1A6E0B-3B1F-4D5E-9C7A-2F4B8D6E1A90}" type="slidenum">
+              <a:rPr lang="en-US" sz="1200" dirty="0">
+                <a:solidFill>
+                  <a:srgbClr val="5F6272"/>
+                </a:solidFill>
+              </a:rPr>
+              <a:t>1</a:t>
+            </a:fld>
+          </a:p>
+        </p:txBody>
+      </p:sp>
     </p:spTree>
   </p:cSld>
   <p:clrMapOvr>
@@ -2479,6 +2513,40 @@
               <a:t xml:space="preserve">7 shirts</a:t>
             </a:r>
             <a:endParaRPr lang="en-US" sz="2325" dirty="0"/>
+          </a:p>
+        </p:txBody>
+      </p:sp>
+      <p:sp>
+        <p:nvSpPr>
+          <p:cNvPr id="10" name="Slide Number 10"/>
+          <p:cNvSpPr txBox="1"/>
+          <p:nvPr/>
+        </p:nvSpPr>
+        <p:spPr>
+          <a:xfrm>
+            <a:off x="11277295" y="6611112"/>
+            <a:ext cx="685800" cy="201168"/>
+          </a:xfrm>
+          <a:prstGeom prst="rect">
+            <a:avLst/>
+          </a:prstGeom>
+          <a:noFill/>
+        </p:spPr>
+        <p:txBody>
+          <a:bodyPr wrap="none" lIns="0" tIns="0" rIns="0" bIns="0" anchor="b">
+            <a:noAutofit/>
+          </a:bodyPr>
+          <a:lstStyle/>
+          <a:p>
+            <a:pPr algn="r"/>
+            <a:fld id="{5C1A6E0B-3B1F-4D5E-9C7A-2F4B8D6E1A90}" type="slidenum">
+              <a:rPr lang="en-US" sz="1200" dirty="0">
+                <a:solidFill>
+                  <a:srgbClr val="5F6272"/>
+                </a:solidFill>
+              </a:rPr>
+              <a:t>10</a:t>
+            </a:fld>
           </a:p>
         </p:txBody>
       </p:sp>
@@ -4957,6 +5025,40 @@
               <a:t xml:space="preserve">(3, 0)</a:t>
             </a:r>
             <a:endParaRPr lang="en-US" sz="1125" dirty="0"/>
+          </a:p>
+        </p:txBody>
+      </p:sp>
+      <p:sp>
+        <p:nvSpPr>
+          <p:cNvPr id="62" name="Slide Number 62"/>
+          <p:cNvSpPr txBox="1"/>
+          <p:nvPr/>
+        </p:nvSpPr>
+        <p:spPr>
+          <a:xfrm>
+            <a:off x="11277295" y="6611112"/>
+            <a:ext cx="685800" cy="201168"/>
+          </a:xfrm>
+          <a:prstGeom prst="rect">
+            <a:avLst/>
+          </a:prstGeom>
+          <a:noFill/>
+        </p:spPr>
+        <p:txBody>
+          <a:bodyPr wrap="none" lIns="0" tIns="0" rIns="0" bIns="0" anchor="b">
+            <a:noAutofit/>
+          </a:bodyPr>
+          <a:lstStyle/>
+          <a:p>
+            <a:pPr algn="r"/>
+            <a:fld id="{5C1A6E0B-3B1F-4D5E-9C7A-2F4B8D6E1A90}" type="slidenum">
+              <a:rPr lang="en-US" sz="1200" dirty="0">
+                <a:solidFill>
+                  <a:srgbClr val="5F6272"/>
+                </a:solidFill>
+              </a:rPr>
+              <a:t>11</a:t>
+            </a:fld>
           </a:p>
         </p:txBody>
       </p:sp>
@@ -5968,6 +6070,40 @@
               <a:t xml:space="preserve"> − 21</a:t>
             </a:r>
             <a:endParaRPr lang="en-US" sz="2325" dirty="0"/>
+          </a:p>
+        </p:txBody>
+      </p:sp>
+      <p:sp>
+        <p:nvSpPr>
+          <p:cNvPr id="14" name="Slide Number 14"/>
+          <p:cNvSpPr txBox="1"/>
+          <p:nvPr/>
+        </p:nvSpPr>
+        <p:spPr>
+          <a:xfrm>
+            <a:off x="11277295" y="6611112"/>
+            <a:ext cx="685800" cy="201168"/>
+          </a:xfrm>
+          <a:prstGeom prst="rect">
+            <a:avLst/>
+          </a:prstGeom>
+          <a:noFill/>
+        </p:spPr>
+        <p:txBody>
+          <a:bodyPr wrap="none" lIns="0" tIns="0" rIns="0" bIns="0" anchor="b">
+            <a:noAutofit/>
+          </a:bodyPr>
+          <a:lstStyle/>
+          <a:p>
+            <a:pPr algn="r"/>
+            <a:fld id="{5C1A6E0B-3B1F-4D5E-9C7A-2F4B8D6E1A90}" type="slidenum">
+              <a:rPr lang="en-US" sz="1200" dirty="0">
+                <a:solidFill>
+                  <a:srgbClr val="5F6272"/>
+                </a:solidFill>
+              </a:rPr>
+              <a:t>12</a:t>
+            </a:fld>
           </a:p>
         </p:txBody>
       </p:sp>
@@ -7060,6 +7196,40 @@
           </a:p>
         </p:txBody>
       </p:sp>
+      <p:sp>
+        <p:nvSpPr>
+          <p:cNvPr id="13" name="Slide Number 13"/>
+          <p:cNvSpPr txBox="1"/>
+          <p:nvPr/>
+        </p:nvSpPr>
+        <p:spPr>
+          <a:xfrm>
+            <a:off x="11277295" y="6611112"/>
+            <a:ext cx="685800" cy="201168"/>
+          </a:xfrm>
+          <a:prstGeom prst="rect">
+            <a:avLst/>
+          </a:prstGeom>
+          <a:noFill/>
+        </p:spPr>
+        <p:txBody>
+          <a:bodyPr wrap="none" lIns="0" tIns="0" rIns="0" bIns="0" anchor="b">
+            <a:noAutofit/>
+          </a:bodyPr>
+          <a:lstStyle/>
+          <a:p>
+            <a:pPr algn="r"/>
+            <a:fld id="{5C1A6E0B-3B1F-4D5E-9C7A-2F4B8D6E1A90}" type="slidenum">
+              <a:rPr lang="en-US" sz="1200" dirty="0">
+                <a:solidFill>
+                  <a:srgbClr val="5F6272"/>
+                </a:solidFill>
+              </a:rPr>
+              <a:t>13</a:t>
+            </a:fld>
+          </a:p>
+        </p:txBody>
+      </p:sp>
     </p:spTree>
   </p:cSld>
   <p:clrMapOvr>
@@ -7686,6 +7856,40 @@
           </a:p>
         </p:txBody>
       </p:sp>
+      <p:sp>
+        <p:nvSpPr>
+          <p:cNvPr id="6" name="Slide Number 6"/>
+          <p:cNvSpPr txBox="1"/>
+          <p:nvPr/>
+        </p:nvSpPr>
+        <p:spPr>
+          <a:xfrm>
+            <a:off x="11277295" y="6611112"/>
+            <a:ext cx="685800" cy="201168"/>
+          </a:xfrm>
+          <a:prstGeom prst="rect">
+            <a:avLst/>
+          </a:prstGeom>
+          <a:noFill/>
+        </p:spPr>
+        <p:txBody>
+          <a:bodyPr wrap="none" lIns="0" tIns="0" rIns="0" bIns="0" anchor="b">
+            <a:noAutofit/>
+          </a:bodyPr>
+          <a:lstStyle/>
+          <a:p>
+            <a:pPr algn="r"/>
+            <a:fld id="{5C1A6E0B-3B1F-4D5E-9C7A-2F4B8D6E1A90}" type="slidenum">
+              <a:rPr lang="en-US" sz="1200" dirty="0">
+                <a:solidFill>
+                  <a:srgbClr val="5F6272"/>
+                </a:solidFill>
+              </a:rPr>
+              <a:t>14</a:t>
+            </a:fld>
+          </a:p>
+        </p:txBody>
+      </p:sp>
     </p:spTree>
   </p:cSld>
   <p:clrMapOvr>
@@ -8527,6 +8731,40 @@
               <a:t xml:space="preserve">x</a:t>
             </a:r>
             <a:endParaRPr lang="en-US" sz="2325" dirty="0"/>
+          </a:p>
+        </p:txBody>
+      </p:sp>
+      <p:sp>
+        <p:nvSpPr>
+          <p:cNvPr id="12" name="Slide Number 12"/>
+          <p:cNvSpPr txBox="1"/>
+          <p:nvPr/>
+        </p:nvSpPr>
+        <p:spPr>
+          <a:xfrm>
+            <a:off x="11277295" y="6611112"/>
+            <a:ext cx="685800" cy="201168"/>
+          </a:xfrm>
+          <a:prstGeom prst="rect">
+            <a:avLst/>
+          </a:prstGeom>
+          <a:noFill/>
+        </p:spPr>
+        <p:txBody>
+          <a:bodyPr wrap="none" lIns="0" tIns="0" rIns="0" bIns="0" anchor="b">
+            <a:noAutofit/>
+          </a:bodyPr>
+          <a:lstStyle/>
+          <a:p>
+            <a:pPr algn="r"/>
+            <a:fld id="{5C1A6E0B-3B1F-4D5E-9C7A-2F4B8D6E1A90}" type="slidenum">
+              <a:rPr lang="en-US" sz="1200" dirty="0">
+                <a:solidFill>
+                  <a:srgbClr val="5F6272"/>
+                </a:solidFill>
+              </a:rPr>
+              <a:t>2</a:t>
+            </a:fld>
           </a:p>
         </p:txBody>
       </p:sp>
@@ -9680,6 +9918,40 @@
           </a:p>
         </p:txBody>
       </p:sp>
+      <p:sp>
+        <p:nvSpPr>
+          <p:cNvPr id="12" name="Slide Number 12"/>
+          <p:cNvSpPr txBox="1"/>
+          <p:nvPr/>
+        </p:nvSpPr>
+        <p:spPr>
+          <a:xfrm>
+            <a:off x="11277295" y="6611112"/>
+            <a:ext cx="685800" cy="201168"/>
+          </a:xfrm>
+          <a:prstGeom prst="rect">
+            <a:avLst/>
+          </a:prstGeom>
+          <a:noFill/>
+        </p:spPr>
+        <p:txBody>
+          <a:bodyPr wrap="none" lIns="0" tIns="0" rIns="0" bIns="0" anchor="b">
+            <a:noAutofit/>
+          </a:bodyPr>
+          <a:lstStyle/>
+          <a:p>
+            <a:pPr algn="r"/>
+            <a:fld id="{5C1A6E0B-3B1F-4D5E-9C7A-2F4B8D6E1A90}" type="slidenum">
+              <a:rPr lang="en-US" sz="1200" dirty="0">
+                <a:solidFill>
+                  <a:srgbClr val="5F6272"/>
+                </a:solidFill>
+              </a:rPr>
+              <a:t>3</a:t>
+            </a:fld>
+          </a:p>
+        </p:txBody>
+      </p:sp>
     </p:spTree>
   </p:cSld>
   <p:clrMapOvr>
@@ -11060,6 +11332,40 @@
           </a:p>
         </p:txBody>
       </p:sp>
+      <p:sp>
+        <p:nvSpPr>
+          <p:cNvPr id="12" name="Slide Number 12"/>
+          <p:cNvSpPr txBox="1"/>
+          <p:nvPr/>
+        </p:nvSpPr>
+        <p:spPr>
+          <a:xfrm>
+            <a:off x="11277295" y="6611112"/>
+            <a:ext cx="685800" cy="201168"/>
+          </a:xfrm>
+          <a:prstGeom prst="rect">
+            <a:avLst/>
+          </a:prstGeom>
+          <a:noFill/>
+        </p:spPr>
+        <p:txBody>
+          <a:bodyPr wrap="none" lIns="0" tIns="0" rIns="0" bIns="0" anchor="b">
+            <a:noAutofit/>
+          </a:bodyPr>
+          <a:lstStyle/>
+          <a:p>
+            <a:pPr algn="r"/>
+            <a:fld id="{5C1A6E0B-3B1F-4D5E-9C7A-2F4B8D6E1A90}" type="slidenum">
+              <a:rPr lang="en-US" sz="1200" dirty="0">
+                <a:solidFill>
+                  <a:srgbClr val="5F6272"/>
+                </a:solidFill>
+              </a:rPr>
+              <a:t>4</a:t>
+            </a:fld>
+          </a:p>
+        </p:txBody>
+      </p:sp>
     </p:spTree>
   </p:cSld>
   <p:clrMapOvr>
@@ -12956,6 +13262,40 @@
           </a:p>
         </p:txBody>
       </p:sp>
+      <p:sp>
+        <p:nvSpPr>
+          <p:cNvPr id="26" name="Slide Number 26"/>
+          <p:cNvSpPr txBox="1"/>
+          <p:nvPr/>
+        </p:nvSpPr>
+        <p:spPr>
+          <a:xfrm>
+            <a:off x="11277295" y="6611112"/>
+            <a:ext cx="685800" cy="201168"/>
+          </a:xfrm>
+          <a:prstGeom prst="rect">
+            <a:avLst/>
+          </a:prstGeom>
+          <a:noFill/>
+        </p:spPr>
+        <p:txBody>
+          <a:bodyPr wrap="none" lIns="0" tIns="0" rIns="0" bIns="0" anchor="b">
+            <a:noAutofit/>
+          </a:bodyPr>
+          <a:lstStyle/>
+          <a:p>
+            <a:pPr algn="r"/>
+            <a:fld id="{5C1A6E0B-3B1F-4D5E-9C7A-2F4B8D6E1A90}" type="slidenum">
+              <a:rPr lang="en-US" sz="1200" dirty="0">
+                <a:solidFill>
+                  <a:srgbClr val="5F6272"/>
+                </a:solidFill>
+              </a:rPr>
+              <a:t>5</a:t>
+            </a:fld>
+          </a:p>
+        </p:txBody>
+      </p:sp>
     </p:spTree>
   </p:cSld>
   <p:clrMapOvr>
@@ -13608,6 +13948,40 @@
           </a:p>
         </p:txBody>
       </p:sp>
+      <p:sp>
+        <p:nvSpPr>
+          <p:cNvPr id="8" name="Slide Number 8"/>
+          <p:cNvSpPr txBox="1"/>
+          <p:nvPr/>
+        </p:nvSpPr>
+        <p:spPr>
+          <a:xfrm>
+            <a:off x="11277295" y="6611112"/>
+            <a:ext cx="685800" cy="201168"/>
+          </a:xfrm>
+          <a:prstGeom prst="rect">
+            <a:avLst/>
+          </a:prstGeom>
+          <a:noFill/>
+        </p:spPr>
+        <p:txBody>
+          <a:bodyPr wrap="none" lIns="0" tIns="0" rIns="0" bIns="0" anchor="b">
+            <a:noAutofit/>
+          </a:bodyPr>
+          <a:lstStyle/>
+          <a:p>
+            <a:pPr algn="r"/>
+            <a:fld id="{5C1A6E0B-3B1F-4D5E-9C7A-2F4B8D6E1A90}" type="slidenum">
+              <a:rPr lang="en-US" sz="1200" dirty="0">
+                <a:solidFill>
+                  <a:srgbClr val="5F6272"/>
+                </a:solidFill>
+              </a:rPr>
+              <a:t>6</a:t>
+            </a:fld>
+          </a:p>
+        </p:txBody>
+      </p:sp>
     </p:spTree>
   </p:cSld>
   <p:clrMapOvr>
@@ -14609,6 +14983,40 @@
               <a:t xml:space="preserve"> + 5</a:t>
             </a:r>
             <a:endParaRPr lang="en-US" sz="2325" dirty="0"/>
+          </a:p>
+        </p:txBody>
+      </p:sp>
+      <p:sp>
+        <p:nvSpPr>
+          <p:cNvPr id="19" name="Slide Number 19"/>
+          <p:cNvSpPr txBox="1"/>
+          <p:nvPr/>
+        </p:nvSpPr>
+        <p:spPr>
+          <a:xfrm>
+            <a:off x="11277295" y="6611112"/>
+            <a:ext cx="685800" cy="201168"/>
+          </a:xfrm>
+          <a:prstGeom prst="rect">
+            <a:avLst/>
+          </a:prstGeom>
+          <a:noFill/>
+        </p:spPr>
+        <p:txBody>
+          <a:bodyPr wrap="none" lIns="0" tIns="0" rIns="0" bIns="0" anchor="b">
+            <a:noAutofit/>
+          </a:bodyPr>
+          <a:lstStyle/>
+          <a:p>
+            <a:pPr algn="r"/>
+            <a:fld id="{5C1A6E0B-3B1F-4D5E-9C7A-2F4B8D6E1A90}" type="slidenum">
+              <a:rPr lang="en-US" sz="1200" dirty="0">
+                <a:solidFill>
+                  <a:srgbClr val="5F6272"/>
+                </a:solidFill>
+              </a:rPr>
+              <a:t>7</a:t>
+            </a:fld>
           </a:p>
         </p:txBody>
       </p:sp>
@@ -15660,6 +16068,40 @@
           </a:p>
         </p:txBody>
       </p:sp>
+      <p:sp>
+        <p:nvSpPr>
+          <p:cNvPr id="18" name="Slide Number 18"/>
+          <p:cNvSpPr txBox="1"/>
+          <p:nvPr/>
+        </p:nvSpPr>
+        <p:spPr>
+          <a:xfrm>
+            <a:off x="11277295" y="6611112"/>
+            <a:ext cx="685800" cy="201168"/>
+          </a:xfrm>
+          <a:prstGeom prst="rect">
+            <a:avLst/>
+          </a:prstGeom>
+          <a:noFill/>
+        </p:spPr>
+        <p:txBody>
+          <a:bodyPr wrap="none" lIns="0" tIns="0" rIns="0" bIns="0" anchor="b">
+            <a:noAutofit/>
+          </a:bodyPr>
+          <a:lstStyle/>
+          <a:p>
+            <a:pPr algn="r"/>
+            <a:fld id="{5C1A6E0B-3B1F-4D5E-9C7A-2F4B8D6E1A90}" type="slidenum">
+              <a:rPr lang="en-US" sz="1200" dirty="0">
+                <a:solidFill>
+                  <a:srgbClr val="5F6272"/>
+                </a:solidFill>
+              </a:rPr>
+              <a:t>8</a:t>
+            </a:fld>
+          </a:p>
+        </p:txBody>
+      </p:sp>
     </p:spTree>
   </p:cSld>
   <p:clrMapOvr>
@@ -16877,6 +17319,40 @@
               <a:t xml:space="preserve">$25</a:t>
             </a:r>
             <a:endParaRPr lang="en-US" sz="2325" dirty="0"/>
+          </a:p>
+        </p:txBody>
+      </p:sp>
+      <p:sp>
+        <p:nvSpPr>
+          <p:cNvPr id="20" name="Slide Number 20"/>
+          <p:cNvSpPr txBox="1"/>
+          <p:nvPr/>
+        </p:nvSpPr>
+        <p:spPr>
+          <a:xfrm>
+            <a:off x="11277295" y="6611112"/>
+            <a:ext cx="685800" cy="201168"/>
+          </a:xfrm>
+          <a:prstGeom prst="rect">
+            <a:avLst/>
+          </a:prstGeom>
+          <a:noFill/>
+        </p:spPr>
+        <p:txBody>
+          <a:bodyPr wrap="none" lIns="0" tIns="0" rIns="0" bIns="0" anchor="b">
+            <a:noAutofit/>
+          </a:bodyPr>
+          <a:lstStyle/>
+          <a:p>
+            <a:pPr algn="r"/>
+            <a:fld id="{5C1A6E0B-3B1F-4D5E-9C7A-2F4B8D6E1A90}" type="slidenum">
+              <a:rPr lang="en-US" sz="1200" dirty="0">
+                <a:solidFill>
+                  <a:srgbClr val="5F6272"/>
+                </a:solidFill>
+              </a:rPr>
+              <a:t>9</a:t>
+            </a:fld>
           </a:p>
         </p:txBody>
       </p:sp>
